--- a/PPT/Review 4.pptx
+++ b/PPT/Review 4.pptx
@@ -3388,7 +3388,7 @@
               </a:defRPr>
             </a:pPr>
             <a:r>
-              <a:t>D Siddhartha — 2510030423        T Harshith — 2510030029</a:t>
+              <a:t>1. D Siddhartha — 2510030423     2. T Harshith Reddy — 2510030029</a:t>
             </a:r>
           </a:p>
           <a:p>
@@ -3401,7 +3401,7 @@
               </a:defRPr>
             </a:pPr>
             <a:r>
-              <a:t>S Anirudh — 2510030418           Bharath — 2510030114</a:t>
+              <a:t>3. S Anirudh — 2510030418        4. Ganesh — 2510030111</a:t>
             </a:r>
           </a:p>
           <a:p>
@@ -3414,7 +3414,7 @@
               </a:defRPr>
             </a:pPr>
             <a:r>
-              <a:t>Ganesh — 2510030111              </a:t>
+              <a:t>5. Bharath — 2510030114</a:t>
             </a:r>
           </a:p>
         </p:txBody>
@@ -3646,7 +3646,7 @@
               </a:defRPr>
             </a:pPr>
             <a:r>
-              <a:t>Supervisor: ____________________</a:t>
+              <a:t>Supervisor: Dr. M. Saidireddy</a:t>
             </a:r>
           </a:p>
         </p:txBody>
@@ -6743,7 +6743,7 @@
               </a:defRPr>
             </a:pPr>
             <a:r>
-              <a:t>• TEAM MEMBERS:</a:t>
+              <a:t>• 1. D Siddhartha — 2510030423</a:t>
             </a:r>
           </a:p>
           <a:p>
@@ -6759,7 +6759,7 @@
               </a:defRPr>
             </a:pPr>
             <a:r>
-              <a:t>• D Siddhartha — 2510030423</a:t>
+              <a:t>• 2. T Harshith Reddy — 2510030029</a:t>
             </a:r>
           </a:p>
           <a:p>
@@ -6775,7 +6775,7 @@
               </a:defRPr>
             </a:pPr>
             <a:r>
-              <a:t>• T Harshith — 2510030029</a:t>
+              <a:t>• 3. S Anirudh — 2510030418</a:t>
             </a:r>
           </a:p>
           <a:p>
@@ -6791,7 +6791,7 @@
               </a:defRPr>
             </a:pPr>
             <a:r>
-              <a:t>• S Anirudh — 2510030418</a:t>
+              <a:t>• 4. Ganesh — 2510030111</a:t>
             </a:r>
           </a:p>
           <a:p>
@@ -6807,7 +6807,7 @@
               </a:defRPr>
             </a:pPr>
             <a:r>
-              <a:t>• Bharath — 2510030114</a:t>
+              <a:t>• 5. Bharath — 2510030114</a:t>
             </a:r>
           </a:p>
           <a:p>
@@ -6823,7 +6823,7 @@
               </a:defRPr>
             </a:pPr>
             <a:r>
-              <a:t>• Ganesh — 2510030111</a:t>
+              <a:t>• Faculty / Supervisor: Dr. M. Saidireddy</a:t>
             </a:r>
           </a:p>
           <a:p>
@@ -6839,7 +6839,7 @@
               </a:defRPr>
             </a:pPr>
             <a:r>
-              <a:t>• </a:t>
+              <a:t>• Course: Data Structures and Algorithms</a:t>
             </a:r>
           </a:p>
           <a:p>
@@ -6855,7 +6855,7 @@
               </a:defRPr>
             </a:pPr>
             <a:r>
-              <a:t>• Course: Data Structures and Algorithms</a:t>
+              <a:t>• Industry Benchmark: Swiggy / Zomato Food Delivery Optimization</a:t>
             </a:r>
           </a:p>
           <a:p>
@@ -6871,7 +6871,7 @@
               </a:defRPr>
             </a:pPr>
             <a:r>
-              <a:t>• Industry Benchmark: Swiggy / Zomato Food Delivery Optimization</a:t>
+              <a:t>• THANK YOU! QUESTIONS &amp; LIVE DEMO WELCOME.</a:t>
             </a:r>
           </a:p>
           <a:p>
